--- a/Demande_de_prompt_formation_IA_2.pptx
+++ b/Demande_de_prompt_formation_IA_2.pptx
@@ -14570,7 +14570,7 @@
     <p:bg>
       <p:bgPr>
         <a:solidFill>
-          <a:srgbClr val="14304A"/>
+          <a:srgbClr val="F7F2EA"/>
         </a:solidFill>
         <a:effectLst/>
       </p:bgPr>
@@ -14591,14 +14591,14 @@
       </p:grpSpPr>
       <p:sp>
         <p:nvSpPr>
-          <p:cNvPr id="2" name="Rectangle 1"/>
-          <p:cNvSpPr/>
-          <p:nvPr/>
-        </p:nvSpPr>
-        <p:spPr>
-          <a:xfrm>
-            <a:off x="1143000" y="1042415"/>
-            <a:ext cx="457200" cy="36576"/>
+          <p:cNvPr id="2" name="Shape 0"/>
+          <p:cNvSpPr/>
+          <p:nvPr/>
+        </p:nvSpPr>
+        <p:spPr>
+          <a:xfrm>
+            <a:off x="1143000" y="1038225"/>
+            <a:ext cx="381000" cy="19050"/>
           </a:xfrm>
           <a:prstGeom prst="rect">
             <a:avLst/>
@@ -14606,175 +14606,943 @@
           <a:solidFill>
             <a:srgbClr val="C0623F"/>
           </a:solidFill>
-          <a:ln>
-            <a:noFill/>
-          </a:ln>
-        </p:spPr>
-        <p:style>
-          <a:lnRef idx="1">
-            <a:schemeClr val="accent1"/>
-          </a:lnRef>
-          <a:fillRef idx="3">
-            <a:schemeClr val="accent1"/>
-          </a:fillRef>
-          <a:effectRef idx="2">
-            <a:schemeClr val="accent1"/>
-          </a:effectRef>
-          <a:fontRef idx="minor">
-            <a:schemeClr val="lt1"/>
-          </a:fontRef>
-        </p:style>
-        <p:txBody>
-          <a:bodyPr rtlCol="0" anchor="ctr"/>
-          <a:lstStyle/>
-          <a:p>
-            <a:pPr algn="ctr"/>
-          </a:p>
-        </p:txBody>
-      </p:sp>
-      <p:sp>
-        <p:nvSpPr>
-          <p:cNvPr id="3" name="TextBox 2"/>
-          <p:cNvSpPr txBox="1"/>
-          <p:nvPr/>
-        </p:nvSpPr>
-        <p:spPr>
-          <a:xfrm>
-            <a:off x="1737360" y="868680"/>
-            <a:ext cx="9144000" cy="365760"/>
-          </a:xfrm>
-          <a:prstGeom prst="rect">
-            <a:avLst/>
-          </a:prstGeom>
-          <a:noFill/>
-        </p:spPr>
-        <p:txBody>
-          <a:bodyPr wrap="none">
-            <a:spAutoFit/>
-          </a:bodyPr>
-          <a:lstStyle/>
-          <a:p>
-            <a:r>
-              <a:rPr sz="1600" b="1">
+          <a:ln/>
+        </p:spPr>
+      </p:sp>
+      <p:sp>
+        <p:nvSpPr>
+          <p:cNvPr id="3" name="Text 1"/>
+          <p:cNvSpPr/>
+          <p:nvPr/>
+        </p:nvSpPr>
+        <p:spPr>
+          <a:xfrm>
+            <a:off x="1676400" y="914400"/>
+            <a:ext cx="4093756" cy="304800"/>
+          </a:xfrm>
+          <a:prstGeom prst="rect">
+            <a:avLst/>
+          </a:prstGeom>
+          <a:noFill/>
+          <a:ln/>
+        </p:spPr>
+        <p:txBody>
+          <a:bodyPr wrap="square" lIns="25400" tIns="25400" rIns="25400" bIns="25400" rtlCol="0" anchor="t">
+            <a:normAutofit lnSpcReduction="10000"/>
+          </a:bodyPr>
+          <a:lstStyle/>
+          <a:p>
+            <a:pPr marL="0" indent="0" algn="l">
+              <a:buNone/>
+            </a:pPr>
+            <a:r>
+              <a:rPr lang="en-US" sz="1800" b="1" kern="0" spc="300" dirty="0">
+                <a:solidFill>
+                  <a:srgbClr val="5B6B79"/>
+                </a:solidFill>
+                <a:latin typeface="Arial" pitchFamily="34" charset="0"/>
+                <a:ea typeface="Arial" pitchFamily="34" charset="-122"/>
+                <a:cs typeface="Arial" pitchFamily="34" charset="-120"/>
+              </a:rPr>
+              <a:t>SÉQUENCE 0 · POURQUOI</a:t>
+            </a:r>
+            <a:endParaRPr lang="en-US" sz="1800" dirty="0"/>
+          </a:p>
+        </p:txBody>
+      </p:sp>
+      <p:sp>
+        <p:nvSpPr>
+          <p:cNvPr id="4" name="Text 2"/>
+          <p:cNvSpPr/>
+          <p:nvPr/>
+        </p:nvSpPr>
+        <p:spPr>
+          <a:xfrm>
+            <a:off x="1143000" y="1390650"/>
+            <a:ext cx="17602200" cy="790873"/>
+          </a:xfrm>
+          <a:prstGeom prst="rect">
+            <a:avLst/>
+          </a:prstGeom>
+          <a:noFill/>
+          <a:ln/>
+        </p:spPr>
+        <p:txBody>
+          <a:bodyPr wrap="square" lIns="25400" tIns="25400" rIns="25400" bIns="25400" rtlCol="0" anchor="t">
+            <a:normAutofit fontScale="92500" lnSpcReduction="20000"/>
+          </a:bodyPr>
+          <a:lstStyle/>
+          <a:p>
+            <a:pPr marL="0" indent="0" algn="l">
+              <a:lnSpc>
+                <a:spcPct val="104000"/>
+              </a:lnSpc>
+              <a:buNone/>
+            </a:pPr>
+            <a:r>
+              <a:rPr lang="en-US" sz="5700" b="1" kern="0" spc="-112" dirty="0">
+                <a:solidFill>
+                  <a:srgbClr val="14304A"/>
+                </a:solidFill>
+                <a:latin typeface="Arial" pitchFamily="34" charset="0"/>
+                <a:ea typeface="Arial" pitchFamily="34" charset="-122"/>
+                <a:cs typeface="Arial" pitchFamily="34" charset="-120"/>
+              </a:rPr>
+              <a:t>Un outil à double tranchant</a:t>
+            </a:r>
+            <a:endParaRPr lang="en-US" sz="5700" dirty="0"/>
+          </a:p>
+        </p:txBody>
+      </p:sp>
+      <p:sp>
+        <p:nvSpPr>
+          <p:cNvPr id="5" name="Shape 3"/>
+          <p:cNvSpPr/>
+          <p:nvPr/>
+        </p:nvSpPr>
+        <p:spPr>
+          <a:xfrm>
+            <a:off x="1143000" y="2562523"/>
+            <a:ext cx="7839075" cy="3196233"/>
+          </a:xfrm>
+          <a:prstGeom prst="roundRect">
+            <a:avLst>
+              <a:gd name="adj" fmla="val 4172"/>
+            </a:avLst>
+          </a:prstGeom>
+          <a:solidFill>
+            <a:srgbClr val="FFFFFF"/>
+          </a:solidFill>
+          <a:ln/>
+        </p:spPr>
+      </p:sp>
+      <p:sp>
+        <p:nvSpPr>
+          <p:cNvPr id="6" name="Shape 4"/>
+          <p:cNvSpPr/>
+          <p:nvPr/>
+        </p:nvSpPr>
+        <p:spPr>
+          <a:xfrm>
+            <a:off x="1143000" y="5749230"/>
+            <a:ext cx="7839075" cy="9525"/>
+          </a:xfrm>
+          <a:prstGeom prst="rect">
+            <a:avLst/>
+          </a:prstGeom>
+          <a:solidFill>
+            <a:srgbClr val="D5DBDF"/>
+          </a:solidFill>
+          <a:ln/>
+        </p:spPr>
+      </p:sp>
+      <p:sp>
+        <p:nvSpPr>
+          <p:cNvPr id="7" name="Shape 5"/>
+          <p:cNvSpPr/>
+          <p:nvPr/>
+        </p:nvSpPr>
+        <p:spPr>
+          <a:xfrm>
+            <a:off x="1143000" y="2562523"/>
+            <a:ext cx="7839075" cy="57150"/>
+          </a:xfrm>
+          <a:prstGeom prst="rect">
+            <a:avLst/>
+          </a:prstGeom>
+          <a:solidFill>
+            <a:srgbClr val="14304A"/>
+          </a:solidFill>
+          <a:ln/>
+        </p:spPr>
+      </p:sp>
+      <p:sp>
+        <p:nvSpPr>
+          <p:cNvPr id="8" name="Shape 6"/>
+          <p:cNvSpPr/>
+          <p:nvPr/>
+        </p:nvSpPr>
+        <p:spPr>
+          <a:xfrm>
+            <a:off x="1143000" y="2562523"/>
+            <a:ext cx="9525" cy="3196233"/>
+          </a:xfrm>
+          <a:prstGeom prst="rect">
+            <a:avLst/>
+          </a:prstGeom>
+          <a:solidFill>
+            <a:srgbClr val="D5DBDF"/>
+          </a:solidFill>
+          <a:ln/>
+        </p:spPr>
+      </p:sp>
+      <p:sp>
+        <p:nvSpPr>
+          <p:cNvPr id="9" name="Shape 7"/>
+          <p:cNvSpPr/>
+          <p:nvPr/>
+        </p:nvSpPr>
+        <p:spPr>
+          <a:xfrm>
+            <a:off x="8972550" y="2562523"/>
+            <a:ext cx="9525" cy="3196233"/>
+          </a:xfrm>
+          <a:prstGeom prst="rect">
+            <a:avLst/>
+          </a:prstGeom>
+          <a:solidFill>
+            <a:srgbClr val="D5DBDF"/>
+          </a:solidFill>
+          <a:ln/>
+        </p:spPr>
+      </p:sp>
+      <p:sp>
+        <p:nvSpPr>
+          <p:cNvPr id="10" name="Text 8"/>
+          <p:cNvSpPr/>
+          <p:nvPr/>
+        </p:nvSpPr>
+        <p:spPr>
+          <a:xfrm>
+            <a:off x="1609725" y="3076873"/>
+            <a:ext cx="7596187" cy="447675"/>
+          </a:xfrm>
+          <a:prstGeom prst="rect">
+            <a:avLst/>
+          </a:prstGeom>
+          <a:noFill/>
+          <a:ln/>
+        </p:spPr>
+        <p:txBody>
+          <a:bodyPr wrap="square" lIns="25400" tIns="25400" rIns="25400" bIns="25400" rtlCol="0" anchor="t">
+            <a:normAutofit lnSpcReduction="10000"/>
+          </a:bodyPr>
+          <a:lstStyle/>
+          <a:p>
+            <a:pPr marL="0" indent="0" algn="l">
+              <a:buNone/>
+            </a:pPr>
+            <a:r>
+              <a:rPr lang="en-US" sz="2850" b="1" dirty="0">
+                <a:solidFill>
+                  <a:srgbClr val="14304A"/>
+                </a:solidFill>
+                <a:latin typeface="Arial" pitchFamily="34" charset="0"/>
+                <a:ea typeface="Arial" pitchFamily="34" charset="-122"/>
+                <a:cs typeface="Arial" pitchFamily="34" charset="-120"/>
+              </a:rPr>
+              <a:t>Opportunité</a:t>
+            </a:r>
+            <a:endParaRPr lang="en-US" sz="2850" dirty="0"/>
+          </a:p>
+        </p:txBody>
+      </p:sp>
+      <p:sp>
+        <p:nvSpPr>
+          <p:cNvPr id="11" name="Text 9"/>
+          <p:cNvSpPr/>
+          <p:nvPr/>
+        </p:nvSpPr>
+        <p:spPr>
+          <a:xfrm>
+            <a:off x="1609725" y="3715048"/>
+            <a:ext cx="177701" cy="449461"/>
+          </a:xfrm>
+          <a:prstGeom prst="rect">
+            <a:avLst/>
+          </a:prstGeom>
+          <a:noFill/>
+          <a:ln/>
+        </p:spPr>
+        <p:txBody>
+          <a:bodyPr wrap="square" lIns="25400" tIns="25400" rIns="25400" bIns="25400" rtlCol="0" anchor="t">
+            <a:normAutofit fontScale="92500" lnSpcReduction="10000"/>
+          </a:bodyPr>
+          <a:lstStyle/>
+          <a:p>
+            <a:pPr marL="0" indent="0" algn="l">
+              <a:lnSpc>
+                <a:spcPct val="135000"/>
+              </a:lnSpc>
+              <a:buNone/>
+            </a:pPr>
+            <a:r>
+              <a:rPr lang="en-US" sz="2400" b="1" dirty="0">
+                <a:solidFill>
+                  <a:srgbClr val="14304A"/>
+                </a:solidFill>
+                <a:latin typeface="Arial" pitchFamily="34" charset="0"/>
+                <a:ea typeface="Arial" pitchFamily="34" charset="-122"/>
+                <a:cs typeface="Arial" pitchFamily="34" charset="-120"/>
+              </a:rPr>
+              <a:t>·</a:t>
+            </a:r>
+            <a:endParaRPr lang="en-US" sz="2400" dirty="0"/>
+          </a:p>
+        </p:txBody>
+      </p:sp>
+      <p:sp>
+        <p:nvSpPr>
+          <p:cNvPr id="12" name="Text 10"/>
+          <p:cNvSpPr/>
+          <p:nvPr/>
+        </p:nvSpPr>
+        <p:spPr>
+          <a:xfrm>
+            <a:off x="1863626" y="3715048"/>
+            <a:ext cx="4567863" cy="449461"/>
+          </a:xfrm>
+          <a:prstGeom prst="rect">
+            <a:avLst/>
+          </a:prstGeom>
+          <a:noFill/>
+          <a:ln/>
+        </p:spPr>
+        <p:txBody>
+          <a:bodyPr wrap="square" lIns="25400" tIns="25400" rIns="25400" bIns="25400" rtlCol="0" anchor="t">
+            <a:normAutofit fontScale="92500" lnSpcReduction="10000"/>
+          </a:bodyPr>
+          <a:lstStyle/>
+          <a:p>
+            <a:pPr marL="0" indent="0" algn="l">
+              <a:lnSpc>
+                <a:spcPct val="135000"/>
+              </a:lnSpc>
+              <a:buNone/>
+            </a:pPr>
+            <a:r>
+              <a:rPr lang="en-US" sz="2400" dirty="0">
+                <a:solidFill>
+                  <a:srgbClr val="1E2933"/>
+                </a:solidFill>
+                <a:latin typeface="Arial" pitchFamily="34" charset="0"/>
+                <a:ea typeface="Arial" pitchFamily="34" charset="-122"/>
+                <a:cs typeface="Arial" pitchFamily="34" charset="-120"/>
+              </a:rPr>
+              <a:t>Alléger les tâches répétitives</a:t>
+            </a:r>
+            <a:endParaRPr lang="en-US" sz="2400" dirty="0"/>
+          </a:p>
+        </p:txBody>
+      </p:sp>
+      <p:sp>
+        <p:nvSpPr>
+          <p:cNvPr id="13" name="Text 11"/>
+          <p:cNvSpPr/>
+          <p:nvPr/>
+        </p:nvSpPr>
+        <p:spPr>
+          <a:xfrm>
+            <a:off x="1609725" y="4297859"/>
+            <a:ext cx="177701" cy="449461"/>
+          </a:xfrm>
+          <a:prstGeom prst="rect">
+            <a:avLst/>
+          </a:prstGeom>
+          <a:noFill/>
+          <a:ln/>
+        </p:spPr>
+        <p:txBody>
+          <a:bodyPr wrap="square" lIns="25400" tIns="25400" rIns="25400" bIns="25400" rtlCol="0" anchor="t">
+            <a:normAutofit fontScale="92500" lnSpcReduction="10000"/>
+          </a:bodyPr>
+          <a:lstStyle/>
+          <a:p>
+            <a:pPr marL="0" indent="0" algn="l">
+              <a:lnSpc>
+                <a:spcPct val="135000"/>
+              </a:lnSpc>
+              <a:buNone/>
+            </a:pPr>
+            <a:r>
+              <a:rPr lang="en-US" sz="2400" b="1" dirty="0">
+                <a:solidFill>
+                  <a:srgbClr val="14304A"/>
+                </a:solidFill>
+                <a:latin typeface="Arial" pitchFamily="34" charset="0"/>
+                <a:ea typeface="Arial" pitchFamily="34" charset="-122"/>
+                <a:cs typeface="Arial" pitchFamily="34" charset="-120"/>
+              </a:rPr>
+              <a:t>·</a:t>
+            </a:r>
+            <a:endParaRPr lang="en-US" sz="2400" dirty="0"/>
+          </a:p>
+        </p:txBody>
+      </p:sp>
+      <p:sp>
+        <p:nvSpPr>
+          <p:cNvPr id="14" name="Text 12"/>
+          <p:cNvSpPr/>
+          <p:nvPr/>
+        </p:nvSpPr>
+        <p:spPr>
+          <a:xfrm>
+            <a:off x="1863626" y="4297859"/>
+            <a:ext cx="3099539" cy="449461"/>
+          </a:xfrm>
+          <a:prstGeom prst="rect">
+            <a:avLst/>
+          </a:prstGeom>
+          <a:noFill/>
+          <a:ln/>
+        </p:spPr>
+        <p:txBody>
+          <a:bodyPr wrap="square" lIns="25400" tIns="25400" rIns="25400" bIns="25400" rtlCol="0" anchor="t">
+            <a:normAutofit fontScale="92500" lnSpcReduction="10000"/>
+          </a:bodyPr>
+          <a:lstStyle/>
+          <a:p>
+            <a:pPr marL="0" indent="0" algn="l">
+              <a:lnSpc>
+                <a:spcPct val="135000"/>
+              </a:lnSpc>
+              <a:buNone/>
+            </a:pPr>
+            <a:r>
+              <a:rPr lang="en-US" sz="2400" dirty="0">
+                <a:solidFill>
+                  <a:srgbClr val="1E2933"/>
+                </a:solidFill>
+                <a:latin typeface="Arial" pitchFamily="34" charset="0"/>
+                <a:ea typeface="Arial" pitchFamily="34" charset="-122"/>
+                <a:cs typeface="Arial" pitchFamily="34" charset="-120"/>
+              </a:rPr>
+              <a:t>Accélérer les délais</a:t>
+            </a:r>
+            <a:endParaRPr lang="en-US" sz="2400" dirty="0"/>
+          </a:p>
+        </p:txBody>
+      </p:sp>
+      <p:sp>
+        <p:nvSpPr>
+          <p:cNvPr id="15" name="Text 13"/>
+          <p:cNvSpPr/>
+          <p:nvPr/>
+        </p:nvSpPr>
+        <p:spPr>
+          <a:xfrm>
+            <a:off x="1609725" y="4880670"/>
+            <a:ext cx="177701" cy="449461"/>
+          </a:xfrm>
+          <a:prstGeom prst="rect">
+            <a:avLst/>
+          </a:prstGeom>
+          <a:noFill/>
+          <a:ln/>
+        </p:spPr>
+        <p:txBody>
+          <a:bodyPr wrap="square" lIns="25400" tIns="25400" rIns="25400" bIns="25400" rtlCol="0" anchor="t">
+            <a:normAutofit fontScale="92500" lnSpcReduction="10000"/>
+          </a:bodyPr>
+          <a:lstStyle/>
+          <a:p>
+            <a:pPr marL="0" indent="0" algn="l">
+              <a:lnSpc>
+                <a:spcPct val="135000"/>
+              </a:lnSpc>
+              <a:buNone/>
+            </a:pPr>
+            <a:r>
+              <a:rPr lang="en-US" sz="2400" b="1" dirty="0">
+                <a:solidFill>
+                  <a:srgbClr val="14304A"/>
+                </a:solidFill>
+                <a:latin typeface="Arial" pitchFamily="34" charset="0"/>
+                <a:ea typeface="Arial" pitchFamily="34" charset="-122"/>
+                <a:cs typeface="Arial" pitchFamily="34" charset="-120"/>
+              </a:rPr>
+              <a:t>·</a:t>
+            </a:r>
+            <a:endParaRPr lang="en-US" sz="2400" dirty="0"/>
+          </a:p>
+        </p:txBody>
+      </p:sp>
+      <p:sp>
+        <p:nvSpPr>
+          <p:cNvPr id="16" name="Text 14"/>
+          <p:cNvSpPr/>
+          <p:nvPr/>
+        </p:nvSpPr>
+        <p:spPr>
+          <a:xfrm>
+            <a:off x="1863626" y="4880670"/>
+            <a:ext cx="5360060" cy="449461"/>
+          </a:xfrm>
+          <a:prstGeom prst="rect">
+            <a:avLst/>
+          </a:prstGeom>
+          <a:noFill/>
+          <a:ln/>
+        </p:spPr>
+        <p:txBody>
+          <a:bodyPr wrap="square" lIns="25400" tIns="25400" rIns="25400" bIns="25400" rtlCol="0" anchor="t">
+            <a:normAutofit fontScale="92500" lnSpcReduction="10000"/>
+          </a:bodyPr>
+          <a:lstStyle/>
+          <a:p>
+            <a:pPr marL="0" indent="0" algn="l">
+              <a:lnSpc>
+                <a:spcPct val="135000"/>
+              </a:lnSpc>
+              <a:buNone/>
+            </a:pPr>
+            <a:r>
+              <a:rPr lang="en-US" sz="2400" dirty="0">
+                <a:solidFill>
+                  <a:srgbClr val="1E2933"/>
+                </a:solidFill>
+                <a:latin typeface="Arial" pitchFamily="34" charset="0"/>
+                <a:ea typeface="Arial" pitchFamily="34" charset="-122"/>
+                <a:cs typeface="Arial" pitchFamily="34" charset="-120"/>
+              </a:rPr>
+              <a:t>Fiabiliser ce qui est automatisable</a:t>
+            </a:r>
+            <a:endParaRPr lang="en-US" sz="2400" dirty="0"/>
+          </a:p>
+        </p:txBody>
+      </p:sp>
+      <p:sp>
+        <p:nvSpPr>
+          <p:cNvPr id="17" name="Shape 15"/>
+          <p:cNvSpPr/>
+          <p:nvPr/>
+        </p:nvSpPr>
+        <p:spPr>
+          <a:xfrm>
+            <a:off x="9305925" y="2562523"/>
+            <a:ext cx="7839075" cy="3196233"/>
+          </a:xfrm>
+          <a:prstGeom prst="roundRect">
+            <a:avLst>
+              <a:gd name="adj" fmla="val 4172"/>
+            </a:avLst>
+          </a:prstGeom>
+          <a:solidFill>
+            <a:srgbClr val="FFFFFF"/>
+          </a:solidFill>
+          <a:ln/>
+        </p:spPr>
+      </p:sp>
+      <p:sp>
+        <p:nvSpPr>
+          <p:cNvPr id="18" name="Shape 16"/>
+          <p:cNvSpPr/>
+          <p:nvPr/>
+        </p:nvSpPr>
+        <p:spPr>
+          <a:xfrm>
+            <a:off x="9305925" y="5749230"/>
+            <a:ext cx="7839075" cy="9525"/>
+          </a:xfrm>
+          <a:prstGeom prst="rect">
+            <a:avLst/>
+          </a:prstGeom>
+          <a:solidFill>
+            <a:srgbClr val="D5DBDF"/>
+          </a:solidFill>
+          <a:ln/>
+        </p:spPr>
+      </p:sp>
+      <p:sp>
+        <p:nvSpPr>
+          <p:cNvPr id="19" name="Shape 17"/>
+          <p:cNvSpPr/>
+          <p:nvPr/>
+        </p:nvSpPr>
+        <p:spPr>
+          <a:xfrm>
+            <a:off x="9305925" y="2562523"/>
+            <a:ext cx="7839075" cy="57150"/>
+          </a:xfrm>
+          <a:prstGeom prst="rect">
+            <a:avLst/>
+          </a:prstGeom>
+          <a:solidFill>
+            <a:srgbClr val="C0623F"/>
+          </a:solidFill>
+          <a:ln/>
+        </p:spPr>
+      </p:sp>
+      <p:sp>
+        <p:nvSpPr>
+          <p:cNvPr id="20" name="Shape 18"/>
+          <p:cNvSpPr/>
+          <p:nvPr/>
+        </p:nvSpPr>
+        <p:spPr>
+          <a:xfrm>
+            <a:off x="9305925" y="2562523"/>
+            <a:ext cx="9525" cy="3196233"/>
+          </a:xfrm>
+          <a:prstGeom prst="rect">
+            <a:avLst/>
+          </a:prstGeom>
+          <a:solidFill>
+            <a:srgbClr val="D5DBDF"/>
+          </a:solidFill>
+          <a:ln/>
+        </p:spPr>
+      </p:sp>
+      <p:sp>
+        <p:nvSpPr>
+          <p:cNvPr id="21" name="Shape 19"/>
+          <p:cNvSpPr/>
+          <p:nvPr/>
+        </p:nvSpPr>
+        <p:spPr>
+          <a:xfrm>
+            <a:off x="17135475" y="2562523"/>
+            <a:ext cx="9525" cy="3196233"/>
+          </a:xfrm>
+          <a:prstGeom prst="rect">
+            <a:avLst/>
+          </a:prstGeom>
+          <a:solidFill>
+            <a:srgbClr val="D5DBDF"/>
+          </a:solidFill>
+          <a:ln/>
+        </p:spPr>
+      </p:sp>
+      <p:sp>
+        <p:nvSpPr>
+          <p:cNvPr id="22" name="Text 20"/>
+          <p:cNvSpPr/>
+          <p:nvPr/>
+        </p:nvSpPr>
+        <p:spPr>
+          <a:xfrm>
+            <a:off x="9772650" y="3076873"/>
+            <a:ext cx="7596187" cy="447675"/>
+          </a:xfrm>
+          <a:prstGeom prst="rect">
+            <a:avLst/>
+          </a:prstGeom>
+          <a:noFill/>
+          <a:ln/>
+        </p:spPr>
+        <p:txBody>
+          <a:bodyPr wrap="square" lIns="25400" tIns="25400" rIns="25400" bIns="25400" rtlCol="0" anchor="t">
+            <a:normAutofit lnSpcReduction="10000"/>
+          </a:bodyPr>
+          <a:lstStyle/>
+          <a:p>
+            <a:pPr marL="0" indent="0" algn="l">
+              <a:buNone/>
+            </a:pPr>
+            <a:r>
+              <a:rPr lang="en-US" sz="2850" b="1" dirty="0">
                 <a:solidFill>
                   <a:srgbClr val="C0623F"/>
                 </a:solidFill>
-                <a:latin typeface="Arial"/>
-              </a:rPr>
-              <a:t>SÉQUENCE 0 · POURQUOI</a:t>
-            </a:r>
-          </a:p>
-        </p:txBody>
-      </p:sp>
-      <p:sp>
-        <p:nvSpPr>
-          <p:cNvPr id="4" name="Rectangle 3"/>
-          <p:cNvSpPr/>
-          <p:nvPr/>
-        </p:nvSpPr>
-        <p:spPr>
-          <a:xfrm>
-            <a:off x="1143000" y="3200400"/>
-            <a:ext cx="118872" cy="3749039"/>
-          </a:xfrm>
-          <a:prstGeom prst="rect">
-            <a:avLst/>
-          </a:prstGeom>
-          <a:solidFill>
-            <a:srgbClr val="C0623F"/>
-          </a:solidFill>
-          <a:ln>
-            <a:noFill/>
-          </a:ln>
-        </p:spPr>
-        <p:style>
-          <a:lnRef idx="1">
-            <a:schemeClr val="accent1"/>
-          </a:lnRef>
-          <a:fillRef idx="3">
-            <a:schemeClr val="accent1"/>
-          </a:fillRef>
-          <a:effectRef idx="2">
-            <a:schemeClr val="accent1"/>
-          </a:effectRef>
-          <a:fontRef idx="minor">
-            <a:schemeClr val="lt1"/>
-          </a:fontRef>
-        </p:style>
-        <p:txBody>
-          <a:bodyPr rtlCol="0" anchor="ctr"/>
-          <a:lstStyle/>
-          <a:p>
-            <a:pPr algn="ctr"/>
-          </a:p>
-        </p:txBody>
-      </p:sp>
-      <p:sp>
-        <p:nvSpPr>
-          <p:cNvPr id="5" name="TextBox 4"/>
-          <p:cNvSpPr txBox="1"/>
-          <p:nvPr/>
-        </p:nvSpPr>
-        <p:spPr>
-          <a:xfrm>
-            <a:off x="1554480" y="3108960"/>
-            <a:ext cx="15179040" cy="3931920"/>
-          </a:xfrm>
-          <a:prstGeom prst="rect">
-            <a:avLst/>
-          </a:prstGeom>
-          <a:noFill/>
-        </p:spPr>
-        <p:txBody>
-          <a:bodyPr wrap="square" anchor="ctr">
-            <a:normAutofit/>
-          </a:bodyPr>
-          <a:lstStyle/>
-          <a:p>
-            <a:r>
-              <a:rPr sz="8600" b="1">
-                <a:solidFill>
-                  <a:srgbClr val="FFFFFF"/>
-                </a:solidFill>
-                <a:latin typeface="Arial"/>
-              </a:rPr>
-              <a:t>Un outil à double tranchant.</a:t>
-            </a:r>
-          </a:p>
-        </p:txBody>
-      </p:sp>
-      <p:sp>
-        <p:nvSpPr>
-          <p:cNvPr id="6" name="TextBox 5"/>
-          <p:cNvSpPr txBox="1"/>
-          <p:nvPr/>
-        </p:nvSpPr>
-        <p:spPr>
-          <a:xfrm>
-            <a:off x="16093440" y="9400032"/>
-            <a:ext cx="1143000" cy="310896"/>
-          </a:xfrm>
-          <a:prstGeom prst="rect">
-            <a:avLst/>
-          </a:prstGeom>
-          <a:noFill/>
-        </p:spPr>
-        <p:txBody>
-          <a:bodyPr wrap="none">
-            <a:spAutoFit/>
-          </a:bodyPr>
-          <a:lstStyle/>
-          <a:p>
-            <a:pPr algn="r"/>
-            <a:r>
-              <a:rPr sz="1100">
-                <a:solidFill>
-                  <a:srgbClr val="F7F2EA"/>
-                </a:solidFill>
-                <a:latin typeface="Arial"/>
+                <a:latin typeface="Arial" pitchFamily="34" charset="0"/>
+                <a:ea typeface="Arial" pitchFamily="34" charset="-122"/>
+                <a:cs typeface="Arial" pitchFamily="34" charset="-120"/>
+              </a:rPr>
+              <a:t>Risque</a:t>
+            </a:r>
+            <a:endParaRPr lang="en-US" sz="2850" dirty="0"/>
+          </a:p>
+        </p:txBody>
+      </p:sp>
+      <p:sp>
+        <p:nvSpPr>
+          <p:cNvPr id="23" name="Text 21"/>
+          <p:cNvSpPr/>
+          <p:nvPr/>
+        </p:nvSpPr>
+        <p:spPr>
+          <a:xfrm>
+            <a:off x="9772650" y="3715048"/>
+            <a:ext cx="177701" cy="449461"/>
+          </a:xfrm>
+          <a:prstGeom prst="rect">
+            <a:avLst/>
+          </a:prstGeom>
+          <a:noFill/>
+          <a:ln/>
+        </p:spPr>
+        <p:txBody>
+          <a:bodyPr wrap="square" lIns="25400" tIns="25400" rIns="25400" bIns="25400" rtlCol="0" anchor="t">
+            <a:normAutofit fontScale="92500" lnSpcReduction="10000"/>
+          </a:bodyPr>
+          <a:lstStyle/>
+          <a:p>
+            <a:pPr marL="0" indent="0" algn="l">
+              <a:lnSpc>
+                <a:spcPct val="135000"/>
+              </a:lnSpc>
+              <a:buNone/>
+            </a:pPr>
+            <a:r>
+              <a:rPr lang="en-US" sz="2400" b="1" dirty="0">
+                <a:solidFill>
+                  <a:srgbClr val="C0623F"/>
+                </a:solidFill>
+                <a:latin typeface="Arial" pitchFamily="34" charset="0"/>
+                <a:ea typeface="Arial" pitchFamily="34" charset="-122"/>
+                <a:cs typeface="Arial" pitchFamily="34" charset="-120"/>
+              </a:rPr>
+              <a:t>·</a:t>
+            </a:r>
+            <a:endParaRPr lang="en-US" sz="2400" dirty="0"/>
+          </a:p>
+        </p:txBody>
+      </p:sp>
+      <p:sp>
+        <p:nvSpPr>
+          <p:cNvPr id="24" name="Text 22"/>
+          <p:cNvSpPr/>
+          <p:nvPr/>
+        </p:nvSpPr>
+        <p:spPr>
+          <a:xfrm>
+            <a:off x="10026551" y="3715048"/>
+            <a:ext cx="5594821" cy="449461"/>
+          </a:xfrm>
+          <a:prstGeom prst="rect">
+            <a:avLst/>
+          </a:prstGeom>
+          <a:noFill/>
+          <a:ln/>
+        </p:spPr>
+        <p:txBody>
+          <a:bodyPr wrap="square" lIns="25400" tIns="25400" rIns="25400" bIns="25400" rtlCol="0" anchor="t">
+            <a:normAutofit fontScale="92500" lnSpcReduction="10000"/>
+          </a:bodyPr>
+          <a:lstStyle/>
+          <a:p>
+            <a:pPr marL="0" indent="0" algn="l">
+              <a:lnSpc>
+                <a:spcPct val="135000"/>
+              </a:lnSpc>
+              <a:buNone/>
+            </a:pPr>
+            <a:r>
+              <a:rPr lang="en-US" sz="2400" dirty="0">
+                <a:solidFill>
+                  <a:srgbClr val="1E2933"/>
+                </a:solidFill>
+                <a:latin typeface="Arial" pitchFamily="34" charset="0"/>
+                <a:ea typeface="Arial" pitchFamily="34" charset="-122"/>
+                <a:cs typeface="Arial" pitchFamily="34" charset="-120"/>
+              </a:rPr>
+              <a:t>Usage sauvage de données patient</a:t>
+            </a:r>
+            <a:endParaRPr lang="en-US" sz="2400" dirty="0"/>
+          </a:p>
+        </p:txBody>
+      </p:sp>
+      <p:sp>
+        <p:nvSpPr>
+          <p:cNvPr id="25" name="Text 23"/>
+          <p:cNvSpPr/>
+          <p:nvPr/>
+        </p:nvSpPr>
+        <p:spPr>
+          <a:xfrm>
+            <a:off x="9772650" y="4297859"/>
+            <a:ext cx="177701" cy="449461"/>
+          </a:xfrm>
+          <a:prstGeom prst="rect">
+            <a:avLst/>
+          </a:prstGeom>
+          <a:noFill/>
+          <a:ln/>
+        </p:spPr>
+        <p:txBody>
+          <a:bodyPr wrap="square" lIns="25400" tIns="25400" rIns="25400" bIns="25400" rtlCol="0" anchor="t">
+            <a:normAutofit fontScale="92500" lnSpcReduction="10000"/>
+          </a:bodyPr>
+          <a:lstStyle/>
+          <a:p>
+            <a:pPr marL="0" indent="0" algn="l">
+              <a:lnSpc>
+                <a:spcPct val="135000"/>
+              </a:lnSpc>
+              <a:buNone/>
+            </a:pPr>
+            <a:r>
+              <a:rPr lang="en-US" sz="2400" b="1" dirty="0">
+                <a:solidFill>
+                  <a:srgbClr val="C0623F"/>
+                </a:solidFill>
+                <a:latin typeface="Arial" pitchFamily="34" charset="0"/>
+                <a:ea typeface="Arial" pitchFamily="34" charset="-122"/>
+                <a:cs typeface="Arial" pitchFamily="34" charset="-120"/>
+              </a:rPr>
+              <a:t>·</a:t>
+            </a:r>
+            <a:endParaRPr lang="en-US" sz="2400" dirty="0"/>
+          </a:p>
+        </p:txBody>
+      </p:sp>
+      <p:sp>
+        <p:nvSpPr>
+          <p:cNvPr id="26" name="Text 24"/>
+          <p:cNvSpPr/>
+          <p:nvPr/>
+        </p:nvSpPr>
+        <p:spPr>
+          <a:xfrm>
+            <a:off x="10026551" y="4297859"/>
+            <a:ext cx="4907563" cy="449461"/>
+          </a:xfrm>
+          <a:prstGeom prst="rect">
+            <a:avLst/>
+          </a:prstGeom>
+          <a:noFill/>
+          <a:ln/>
+        </p:spPr>
+        <p:txBody>
+          <a:bodyPr wrap="square" lIns="25400" tIns="25400" rIns="25400" bIns="25400" rtlCol="0" anchor="t">
+            <a:normAutofit fontScale="92500" lnSpcReduction="10000"/>
+          </a:bodyPr>
+          <a:lstStyle/>
+          <a:p>
+            <a:pPr marL="0" indent="0" algn="l">
+              <a:lnSpc>
+                <a:spcPct val="135000"/>
+              </a:lnSpc>
+              <a:buNone/>
+            </a:pPr>
+            <a:r>
+              <a:rPr lang="en-US" sz="2400" dirty="0">
+                <a:solidFill>
+                  <a:srgbClr val="1E2933"/>
+                </a:solidFill>
+                <a:latin typeface="Arial" pitchFamily="34" charset="0"/>
+                <a:ea typeface="Arial" pitchFamily="34" charset="-122"/>
+                <a:cs typeface="Arial" pitchFamily="34" charset="-120"/>
+              </a:rPr>
+              <a:t>Prendre du retard si on l'ignore</a:t>
+            </a:r>
+            <a:endParaRPr lang="en-US" sz="2400" dirty="0"/>
+          </a:p>
+        </p:txBody>
+      </p:sp>
+      <p:sp>
+        <p:nvSpPr>
+          <p:cNvPr id="27" name="Text 25"/>
+          <p:cNvSpPr/>
+          <p:nvPr/>
+        </p:nvSpPr>
+        <p:spPr>
+          <a:xfrm>
+            <a:off x="1143000" y="6177855"/>
+            <a:ext cx="17602200" cy="409575"/>
+          </a:xfrm>
+          <a:prstGeom prst="rect">
+            <a:avLst/>
+          </a:prstGeom>
+          <a:noFill/>
+          <a:ln/>
+        </p:spPr>
+        <p:txBody>
+          <a:bodyPr wrap="square" lIns="25400" tIns="25400" rIns="25400" bIns="25400" rtlCol="0" anchor="t">
+            <a:normAutofit lnSpcReduction="10000"/>
+          </a:bodyPr>
+          <a:lstStyle/>
+          <a:p>
+            <a:pPr marL="0" indent="0" algn="l">
+              <a:buNone/>
+            </a:pPr>
+            <a:r>
+              <a:rPr lang="en-US" sz="2400" dirty="0">
+                <a:solidFill>
+                  <a:srgbClr val="5B6B79"/>
+                </a:solidFill>
+                <a:latin typeface="Arial" pitchFamily="34" charset="0"/>
+                <a:ea typeface="Arial" pitchFamily="34" charset="-122"/>
+                <a:cs typeface="Arial" pitchFamily="34" charset="-120"/>
+              </a:rPr>
+              <a:t>C'est pour ça qu'on est là aujourd'hui.</a:t>
+            </a:r>
+            <a:endParaRPr lang="en-US" sz="2400" dirty="0"/>
+          </a:p>
+        </p:txBody>
+      </p:sp>
+      <p:sp>
+        <p:nvSpPr>
+          <p:cNvPr id="28" name="Shape 26"/>
+          <p:cNvSpPr/>
+          <p:nvPr/>
+        </p:nvSpPr>
+        <p:spPr>
+          <a:xfrm>
+            <a:off x="1143000" y="9020175"/>
+            <a:ext cx="16002000" cy="9525"/>
+          </a:xfrm>
+          <a:prstGeom prst="rect">
+            <a:avLst/>
+          </a:prstGeom>
+          <a:solidFill>
+            <a:srgbClr val="D5DBDF"/>
+          </a:solidFill>
+          <a:ln/>
+        </p:spPr>
+      </p:sp>
+      <p:pic>
+        <p:nvPicPr>
+          <p:cNvPr id="29" name="Image 0" descr="preencoded.png"/>
+          <p:cNvPicPr>
+            <a:picLocks noChangeAspect="1"/>
+          </p:cNvPicPr>
+          <p:nvPr/>
+        </p:nvPicPr>
+        <p:blipFill>
+          <a:blip r:embed="rId3"/>
+          <a:stretch>
+            <a:fillRect/>
+          </a:stretch>
+        </p:blipFill>
+        <p:spPr>
+          <a:xfrm>
+            <a:off x="1143000" y="9239250"/>
+            <a:ext cx="393204" cy="590550"/>
+          </a:xfrm>
+          <a:prstGeom prst="rect">
+            <a:avLst/>
+          </a:prstGeom>
+        </p:spPr>
+      </p:pic>
+      <p:sp>
+        <p:nvSpPr>
+          <p:cNvPr id="30" name="Text 27"/>
+          <p:cNvSpPr/>
+          <p:nvPr/>
+        </p:nvSpPr>
+        <p:spPr>
+          <a:xfrm>
+            <a:off x="16228070" y="9396413"/>
+            <a:ext cx="993130" cy="314325"/>
+          </a:xfrm>
+          <a:prstGeom prst="rect">
+            <a:avLst/>
+          </a:prstGeom>
+          <a:noFill/>
+          <a:ln/>
+        </p:spPr>
+        <p:txBody>
+          <a:bodyPr wrap="square" lIns="25400" tIns="25400" rIns="25400" bIns="25400" rtlCol="0" anchor="t">
+            <a:normAutofit lnSpcReduction="10000"/>
+          </a:bodyPr>
+          <a:lstStyle/>
+          <a:p>
+            <a:pPr marL="0" indent="0" algn="l">
+              <a:buNone/>
+            </a:pPr>
+            <a:r>
+              <a:rPr lang="en-US" sz="1800" kern="0" spc="150" dirty="0">
+                <a:solidFill>
+                  <a:srgbClr val="8A9097"/>
+                </a:solidFill>
+                <a:latin typeface="Arial" pitchFamily="34" charset="0"/>
+                <a:ea typeface="Arial" pitchFamily="34" charset="-122"/>
+                <a:cs typeface="Arial" pitchFamily="34" charset="-120"/>
               </a:rPr>
               <a:t>04 / 23</a:t>
             </a:r>
+            <a:endParaRPr lang="en-US" sz="1800" dirty="0"/>
           </a:p>
         </p:txBody>
       </p:sp>
@@ -16828,7 +17596,7 @@
         <p:spPr>
           <a:xfrm>
             <a:off x="1143000" y="2933998"/>
-            <a:ext cx="5162550" cy="3356372"/>
+            <a:ext cx="7589520" cy="3356372"/>
           </a:xfrm>
           <a:prstGeom prst="roundRect">
             <a:avLst>
@@ -16850,7 +17618,7 @@
         <p:spPr>
           <a:xfrm>
             <a:off x="1143000" y="6280845"/>
-            <a:ext cx="5162550" cy="9525"/>
+            <a:ext cx="7589520" cy="9525"/>
           </a:xfrm>
           <a:prstGeom prst="rect">
             <a:avLst/>
@@ -16870,7 +17638,7 @@
         <p:spPr>
           <a:xfrm>
             <a:off x="1143000" y="2933998"/>
-            <a:ext cx="5162550" cy="47625"/>
+            <a:ext cx="7589520" cy="47625"/>
           </a:xfrm>
           <a:prstGeom prst="rect">
             <a:avLst/>
@@ -16909,7 +17677,7 @@
         </p:nvSpPr>
         <p:spPr>
           <a:xfrm>
-            <a:off x="6296025" y="2933998"/>
+            <a:off x="8732520" y="2933998"/>
             <a:ext cx="9525" cy="3356372"/>
           </a:xfrm>
           <a:prstGeom prst="rect">
@@ -16991,7 +17759,7 @@
         <p:spPr>
           <a:xfrm>
             <a:off x="1533525" y="3896023"/>
-            <a:ext cx="4381500" cy="1101030"/>
+            <a:ext cx="6766560" cy="1101030"/>
           </a:xfrm>
           <a:prstGeom prst="roundRect">
             <a:avLst>
@@ -17013,7 +17781,7 @@
         <p:spPr>
           <a:xfrm>
             <a:off x="1762125" y="4086523"/>
-            <a:ext cx="4055745" cy="758130"/>
+            <a:ext cx="6400800" cy="758130"/>
           </a:xfrm>
           <a:prstGeom prst="rect">
             <a:avLst/>
@@ -17057,7 +17825,7 @@
         <p:spPr>
           <a:xfrm>
             <a:off x="1533525" y="5206603"/>
-            <a:ext cx="4512945" cy="731341"/>
+            <a:ext cx="6766560" cy="731341"/>
           </a:xfrm>
           <a:prstGeom prst="rect">
             <a:avLst/>
@@ -17100,8 +17868,8 @@
         </p:nvSpPr>
         <p:spPr>
           <a:xfrm>
-            <a:off x="6572250" y="2933998"/>
-            <a:ext cx="5162550" cy="3356372"/>
+            <a:off x="9553193" y="2933998"/>
+            <a:ext cx="7589520" cy="3356372"/>
           </a:xfrm>
           <a:prstGeom prst="roundRect">
             <a:avLst>
@@ -17122,8 +17890,8 @@
         </p:nvSpPr>
         <p:spPr>
           <a:xfrm>
-            <a:off x="6572250" y="6280845"/>
-            <a:ext cx="5162550" cy="9525"/>
+            <a:off x="9553193" y="6280845"/>
+            <a:ext cx="7589520" cy="9525"/>
           </a:xfrm>
           <a:prstGeom prst="rect">
             <a:avLst/>
@@ -17142,8 +17910,8 @@
         </p:nvSpPr>
         <p:spPr>
           <a:xfrm>
-            <a:off x="6572250" y="2933998"/>
-            <a:ext cx="5162550" cy="47625"/>
+            <a:off x="9553193" y="2933998"/>
+            <a:ext cx="7589520" cy="47625"/>
           </a:xfrm>
           <a:prstGeom prst="rect">
             <a:avLst/>
@@ -17162,7 +17930,7 @@
         </p:nvSpPr>
         <p:spPr>
           <a:xfrm>
-            <a:off x="6572250" y="2933998"/>
+            <a:off x="9553193" y="2933998"/>
             <a:ext cx="9525" cy="3356372"/>
           </a:xfrm>
           <a:prstGeom prst="rect">
@@ -17182,7 +17950,7 @@
         </p:nvSpPr>
         <p:spPr>
           <a:xfrm>
-            <a:off x="11725275" y="2933998"/>
+            <a:off x="17145000" y="2933998"/>
             <a:ext cx="9525" cy="3356372"/>
           </a:xfrm>
           <a:prstGeom prst="rect">
@@ -17202,7 +17970,7 @@
         </p:nvSpPr>
         <p:spPr>
           <a:xfrm>
-            <a:off x="6962775" y="3438823"/>
+            <a:off x="9943718" y="3438823"/>
             <a:ext cx="171450" cy="171450"/>
           </a:xfrm>
           <a:prstGeom prst="ellipse">
@@ -17222,7 +17990,7 @@
         </p:nvSpPr>
         <p:spPr>
           <a:xfrm>
-            <a:off x="7267575" y="3362623"/>
+            <a:off x="10248518" y="3362623"/>
             <a:ext cx="1968788" cy="361950"/>
           </a:xfrm>
           <a:prstGeom prst="rect">
@@ -17263,7 +18031,7 @@
         </p:nvSpPr>
         <p:spPr>
           <a:xfrm>
-            <a:off x="6962775" y="3896023"/>
+            <a:off x="9943718" y="3896023"/>
             <a:ext cx="2276773" cy="400050"/>
           </a:xfrm>
           <a:prstGeom prst="roundRect">
@@ -17285,7 +18053,7 @@
         </p:nvSpPr>
         <p:spPr>
           <a:xfrm>
-            <a:off x="7134225" y="3972223"/>
+            <a:off x="10115168" y="3972223"/>
             <a:ext cx="2010073" cy="285750"/>
           </a:xfrm>
           <a:prstGeom prst="rect">
@@ -17326,7 +18094,7 @@
         </p:nvSpPr>
         <p:spPr>
           <a:xfrm>
-            <a:off x="9334798" y="3896023"/>
+            <a:off x="12315741" y="3896023"/>
             <a:ext cx="1775817" cy="400050"/>
           </a:xfrm>
           <a:prstGeom prst="roundRect">
@@ -17348,7 +18116,7 @@
         </p:nvSpPr>
         <p:spPr>
           <a:xfrm>
-            <a:off x="9506248" y="3972223"/>
+            <a:off x="12487191" y="3972223"/>
             <a:ext cx="1509117" cy="285750"/>
           </a:xfrm>
           <a:prstGeom prst="rect">
@@ -17389,7 +18157,7 @@
         </p:nvSpPr>
         <p:spPr>
           <a:xfrm>
-            <a:off x="6962775" y="4391323"/>
+            <a:off x="9943718" y="4391323"/>
             <a:ext cx="1554361" cy="400050"/>
           </a:xfrm>
           <a:prstGeom prst="roundRect">
@@ -17411,7 +18179,7 @@
         </p:nvSpPr>
         <p:spPr>
           <a:xfrm>
-            <a:off x="7134225" y="4467523"/>
+            <a:off x="10115168" y="4467523"/>
             <a:ext cx="1287661" cy="285750"/>
           </a:xfrm>
           <a:prstGeom prst="rect">
@@ -17452,8 +18220,8 @@
         </p:nvSpPr>
         <p:spPr>
           <a:xfrm>
-            <a:off x="6962775" y="5000923"/>
-            <a:ext cx="4512945" cy="731341"/>
+            <a:off x="9943718" y="5000923"/>
+            <a:ext cx="6766560" cy="731341"/>
           </a:xfrm>
           <a:prstGeom prst="rect">
             <a:avLst/>
@@ -17483,113 +18251,6 @@
                 <a:cs typeface="Arial" pitchFamily="34" charset="-120"/>
               </a:rPr>
               <a:t>Réponse pertinente, directement exploitable.</a:t>
-            </a:r>
-            <a:endParaRPr lang="en-US" sz="1950" dirty="0"/>
-          </a:p>
-        </p:txBody>
-      </p:sp>
-      <p:sp>
-        <p:nvSpPr>
-          <p:cNvPr id="30" name="Shape 28"/>
-          <p:cNvSpPr/>
-          <p:nvPr/>
-        </p:nvSpPr>
-        <p:spPr>
-          <a:xfrm>
-            <a:off x="12001500" y="2933998"/>
-            <a:ext cx="5143500" cy="3356372"/>
-          </a:xfrm>
-          <a:prstGeom prst="roundRect">
-            <a:avLst>
-              <a:gd name="adj" fmla="val 3973"/>
-            </a:avLst>
-          </a:prstGeom>
-          <a:solidFill>
-            <a:srgbClr val="14304A"/>
-          </a:solidFill>
-          <a:ln/>
-        </p:spPr>
-      </p:sp>
-      <p:sp>
-        <p:nvSpPr>
-          <p:cNvPr id="31" name="Text 29"/>
-          <p:cNvSpPr/>
-          <p:nvPr/>
-        </p:nvSpPr>
-        <p:spPr>
-          <a:xfrm>
-            <a:off x="12382500" y="3998863"/>
-            <a:ext cx="4819650" cy="361950"/>
-          </a:xfrm>
-          <a:prstGeom prst="rect">
-            <a:avLst/>
-          </a:prstGeom>
-          <a:noFill/>
-          <a:ln/>
-        </p:spPr>
-        <p:txBody>
-          <a:bodyPr wrap="square" lIns="25400" tIns="25400" rIns="25400" bIns="25400" rtlCol="0" anchor="t">
-            <a:normAutofit lnSpcReduction="10000"/>
-          </a:bodyPr>
-          <a:lstStyle/>
-          <a:p>
-            <a:pPr marL="0" indent="0" algn="l">
-              <a:buNone/>
-            </a:pPr>
-            <a:r>
-              <a:rPr lang="en-US" sz="2250" b="1" dirty="0">
-                <a:solidFill>
-                  <a:srgbClr val="FFFFFF"/>
-                </a:solidFill>
-                <a:latin typeface="Arial" pitchFamily="34" charset="0"/>
-                <a:ea typeface="Arial" pitchFamily="34" charset="-122"/>
-                <a:cs typeface="Arial" pitchFamily="34" charset="-120"/>
-              </a:rPr>
-              <a:t>Un outil généraliste</a:t>
-            </a:r>
-            <a:endParaRPr lang="en-US" sz="2250" dirty="0"/>
-          </a:p>
-        </p:txBody>
-      </p:sp>
-      <p:sp>
-        <p:nvSpPr>
-          <p:cNvPr id="32" name="Text 30"/>
-          <p:cNvSpPr/>
-          <p:nvPr/>
-        </p:nvSpPr>
-        <p:spPr>
-          <a:xfrm>
-            <a:off x="12382500" y="4532263"/>
-            <a:ext cx="4512945" cy="731341"/>
-          </a:xfrm>
-          <a:prstGeom prst="rect">
-            <a:avLst/>
-          </a:prstGeom>
-          <a:noFill/>
-          <a:ln/>
-        </p:spPr>
-        <p:txBody>
-          <a:bodyPr wrap="square" lIns="25400" tIns="25400" rIns="25400" bIns="25400" rtlCol="0" anchor="t">
-            <a:normAutofit fontScale="92500" lnSpcReduction="20000"/>
-          </a:bodyPr>
-          <a:lstStyle/>
-          <a:p>
-            <a:pPr marL="0" indent="0" algn="l">
-              <a:lnSpc>
-                <a:spcPct val="140000"/>
-              </a:lnSpc>
-              <a:buNone/>
-            </a:pPr>
-            <a:r>
-              <a:rPr lang="en-US" sz="1950" dirty="0">
-                <a:solidFill>
-                  <a:srgbClr val="C7D2DB"/>
-                </a:solidFill>
-                <a:latin typeface="Arial" pitchFamily="34" charset="0"/>
-                <a:ea typeface="Arial" pitchFamily="34" charset="-122"/>
-                <a:cs typeface="Arial" pitchFamily="34" charset="-120"/>
-              </a:rPr>
-              <a:t>Le contexte le transforme en aide réellement utile.</a:t>
             </a:r>
             <a:endParaRPr lang="en-US" sz="1950" dirty="0"/>
           </a:p>
@@ -18748,7 +19409,7 @@
     <p:bg>
       <p:bgPr>
         <a:solidFill>
-          <a:srgbClr val="14304A"/>
+          <a:srgbClr val="F7F2EA"/>
         </a:solidFill>
         <a:effectLst/>
       </p:bgPr>
@@ -18769,14 +19430,14 @@
       </p:grpSpPr>
       <p:sp>
         <p:nvSpPr>
-          <p:cNvPr id="2" name="Rectangle 1"/>
-          <p:cNvSpPr/>
-          <p:nvPr/>
-        </p:nvSpPr>
-        <p:spPr>
-          <a:xfrm>
-            <a:off x="1143000" y="1042415"/>
-            <a:ext cx="457200" cy="36576"/>
+          <p:cNvPr id="2" name="Shape 0"/>
+          <p:cNvSpPr/>
+          <p:nvPr/>
+        </p:nvSpPr>
+        <p:spPr>
+          <a:xfrm>
+            <a:off x="1143000" y="2139404"/>
+            <a:ext cx="381000" cy="19050"/>
           </a:xfrm>
           <a:prstGeom prst="rect">
             <a:avLst/>
@@ -18784,76 +19445,214 @@
           <a:solidFill>
             <a:srgbClr val="C0623F"/>
           </a:solidFill>
-          <a:ln>
-            <a:noFill/>
-          </a:ln>
-        </p:spPr>
-        <p:style>
-          <a:lnRef idx="1">
-            <a:schemeClr val="accent1"/>
-          </a:lnRef>
-          <a:fillRef idx="3">
-            <a:schemeClr val="accent1"/>
-          </a:fillRef>
-          <a:effectRef idx="2">
-            <a:schemeClr val="accent1"/>
-          </a:effectRef>
-          <a:fontRef idx="minor">
-            <a:schemeClr val="lt1"/>
-          </a:fontRef>
-        </p:style>
-        <p:txBody>
-          <a:bodyPr rtlCol="0" anchor="ctr"/>
-          <a:lstStyle/>
-          <a:p>
-            <a:pPr algn="ctr"/>
-          </a:p>
-        </p:txBody>
-      </p:sp>
-      <p:sp>
-        <p:nvSpPr>
-          <p:cNvPr id="3" name="TextBox 2"/>
-          <p:cNvSpPr txBox="1"/>
-          <p:nvPr/>
-        </p:nvSpPr>
-        <p:spPr>
-          <a:xfrm>
-            <a:off x="1737360" y="868680"/>
-            <a:ext cx="9144000" cy="365760"/>
-          </a:xfrm>
-          <a:prstGeom prst="rect">
-            <a:avLst/>
-          </a:prstGeom>
-          <a:noFill/>
-        </p:spPr>
-        <p:txBody>
-          <a:bodyPr wrap="none">
-            <a:spAutoFit/>
-          </a:bodyPr>
-          <a:lstStyle/>
-          <a:p>
-            <a:r>
-              <a:rPr sz="1600" b="1">
+          <a:ln/>
+        </p:spPr>
+      </p:sp>
+      <p:sp>
+        <p:nvSpPr>
+          <p:cNvPr id="3" name="Text 1"/>
+          <p:cNvSpPr/>
+          <p:nvPr/>
+        </p:nvSpPr>
+        <p:spPr>
+          <a:xfrm>
+            <a:off x="1676400" y="2015579"/>
+            <a:ext cx="3670563" cy="304800"/>
+          </a:xfrm>
+          <a:prstGeom prst="rect">
+            <a:avLst/>
+          </a:prstGeom>
+          <a:noFill/>
+          <a:ln/>
+        </p:spPr>
+        <p:txBody>
+          <a:bodyPr wrap="square" lIns="25400" tIns="25400" rIns="25400" bIns="25400" rtlCol="0" anchor="t">
+            <a:normAutofit lnSpcReduction="10000"/>
+          </a:bodyPr>
+          <a:lstStyle/>
+          <a:p>
+            <a:pPr marL="0" indent="0" algn="l">
+              <a:buNone/>
+            </a:pPr>
+            <a:r>
+              <a:rPr lang="en-US" sz="1800" b="1" kern="0" spc="300" dirty="0">
                 <a:solidFill>
                   <a:srgbClr val="C0623F"/>
                 </a:solidFill>
-                <a:latin typeface="Arial"/>
+                <a:latin typeface="Arial" pitchFamily="34" charset="0"/>
+                <a:ea typeface="Arial" pitchFamily="34" charset="-122"/>
+                <a:cs typeface="Arial" pitchFamily="34" charset="-120"/>
               </a:rPr>
               <a:t>HISTOIRE VRAIE · 2023</a:t>
             </a:r>
-          </a:p>
-        </p:txBody>
-      </p:sp>
-      <p:sp>
-        <p:nvSpPr>
-          <p:cNvPr id="4" name="Rectangle 3"/>
-          <p:cNvSpPr/>
-          <p:nvPr/>
-        </p:nvSpPr>
-        <p:spPr>
-          <a:xfrm>
-            <a:off x="1143000" y="3200400"/>
-            <a:ext cx="118872" cy="3749039"/>
+            <a:endParaRPr lang="en-US" sz="1800" dirty="0"/>
+          </a:p>
+        </p:txBody>
+      </p:sp>
+      <p:sp>
+        <p:nvSpPr>
+          <p:cNvPr id="4" name="Text 2"/>
+          <p:cNvSpPr/>
+          <p:nvPr/>
+        </p:nvSpPr>
+        <p:spPr>
+          <a:xfrm>
+            <a:off x="1143000" y="2568029"/>
+            <a:ext cx="17602200" cy="895350"/>
+          </a:xfrm>
+          <a:prstGeom prst="rect">
+            <a:avLst/>
+          </a:prstGeom>
+          <a:noFill/>
+          <a:ln/>
+        </p:spPr>
+        <p:txBody>
+          <a:bodyPr wrap="square" lIns="25400" tIns="25400" rIns="25400" bIns="25400" rtlCol="0" anchor="t">
+            <a:normAutofit fontScale="92500" lnSpcReduction="20000"/>
+          </a:bodyPr>
+          <a:lstStyle/>
+          <a:p>
+            <a:pPr marL="0" indent="0" algn="l">
+              <a:lnSpc>
+                <a:spcPct val="60000"/>
+              </a:lnSpc>
+              <a:buNone/>
+            </a:pPr>
+            <a:r>
+              <a:rPr lang="en-US" sz="11250" b="1" dirty="0">
+                <a:solidFill>
+                  <a:srgbClr val="C0623F"/>
+                </a:solidFill>
+                <a:latin typeface="Arial" pitchFamily="34" charset="0"/>
+                <a:ea typeface="Arial" pitchFamily="34" charset="-122"/>
+                <a:cs typeface="Arial" pitchFamily="34" charset="-120"/>
+              </a:rPr>
+              <a:t>“</a:t>
+            </a:r>
+            <a:endParaRPr lang="en-US" sz="11250" dirty="0"/>
+          </a:p>
+        </p:txBody>
+      </p:sp>
+      <p:sp>
+        <p:nvSpPr>
+          <p:cNvPr id="5" name="Text 3"/>
+          <p:cNvSpPr/>
+          <p:nvPr/>
+        </p:nvSpPr>
+        <p:spPr>
+          <a:xfrm>
+            <a:off x="1143000" y="3711029"/>
+            <a:ext cx="15304770" cy="1560314"/>
+          </a:xfrm>
+          <a:prstGeom prst="rect">
+            <a:avLst/>
+          </a:prstGeom>
+          <a:noFill/>
+          <a:ln/>
+        </p:spPr>
+        <p:txBody>
+          <a:bodyPr wrap="square" lIns="25400" tIns="25400" rIns="25400" bIns="25400" rtlCol="0" anchor="t">
+            <a:normAutofit fontScale="92500" lnSpcReduction="20000"/>
+          </a:bodyPr>
+          <a:lstStyle/>
+          <a:p>
+            <a:pPr marL="0" indent="0" algn="l">
+              <a:lnSpc>
+                <a:spcPct val="108000"/>
+              </a:lnSpc>
+              <a:buNone/>
+            </a:pPr>
+            <a:r>
+              <a:rPr lang="en-US" sz="5550" b="1" kern="0" spc="-112" dirty="0">
+                <a:solidFill>
+                  <a:srgbClr val="14304A"/>
+                </a:solidFill>
+                <a:latin typeface="Arial" pitchFamily="34" charset="0"/>
+                <a:ea typeface="Arial" pitchFamily="34" charset="-122"/>
+                <a:cs typeface="Arial" pitchFamily="34" charset="-120"/>
+              </a:rPr>
+              <a:t>Un avocat a cité six jugements à l'appui de son dossier. Aucun n'existait.</a:t>
+            </a:r>
+            <a:endParaRPr lang="en-US" sz="5550" dirty="0"/>
+          </a:p>
+        </p:txBody>
+      </p:sp>
+      <p:sp>
+        <p:nvSpPr>
+          <p:cNvPr id="6" name="Text 4"/>
+          <p:cNvSpPr/>
+          <p:nvPr/>
+        </p:nvSpPr>
+        <p:spPr>
+          <a:xfrm>
+            <a:off x="1143000" y="5518993"/>
+            <a:ext cx="14519910" cy="998041"/>
+          </a:xfrm>
+          <a:prstGeom prst="rect">
+            <a:avLst/>
+          </a:prstGeom>
+          <a:noFill/>
+          <a:ln/>
+        </p:spPr>
+        <p:txBody>
+          <a:bodyPr wrap="square" lIns="25400" tIns="25400" rIns="25400" bIns="25400" rtlCol="0" anchor="t">
+            <a:normAutofit fontScale="92500" lnSpcReduction="20000"/>
+          </a:bodyPr>
+          <a:lstStyle/>
+          <a:p>
+            <a:pPr marL="0" indent="0" algn="l">
+              <a:lnSpc>
+                <a:spcPct val="140000"/>
+              </a:lnSpc>
+              <a:buNone/>
+            </a:pPr>
+            <a:r>
+              <a:rPr lang="en-US" sz="2700" dirty="0">
+                <a:solidFill>
+                  <a:srgbClr val="1E2933"/>
+                </a:solidFill>
+                <a:latin typeface="Arial" pitchFamily="34" charset="0"/>
+                <a:ea typeface="Arial" pitchFamily="34" charset="-122"/>
+                <a:cs typeface="Arial" pitchFamily="34" charset="-120"/>
+              </a:rPr>
+              <a:t>Il les avait demandés à une IA et, confiant, ne les a pas vérifiés. Le juge, lui, a cherché. Il n'a rien trouvé.</a:t>
+            </a:r>
+            <a:endParaRPr lang="en-US" sz="2700" dirty="0"/>
+          </a:p>
+        </p:txBody>
+      </p:sp>
+      <p:sp>
+        <p:nvSpPr>
+          <p:cNvPr id="7" name="Shape 5"/>
+          <p:cNvSpPr/>
+          <p:nvPr/>
+        </p:nvSpPr>
+        <p:spPr>
+          <a:xfrm>
+            <a:off x="1143000" y="6840885"/>
+            <a:ext cx="13535025" cy="992386"/>
+          </a:xfrm>
+          <a:prstGeom prst="roundRect">
+            <a:avLst>
+              <a:gd name="adj" fmla="val 9598"/>
+            </a:avLst>
+          </a:prstGeom>
+          <a:solidFill>
+            <a:srgbClr val="FBEDE7"/>
+          </a:solidFill>
+          <a:ln/>
+        </p:spPr>
+      </p:sp>
+      <p:sp>
+        <p:nvSpPr>
+          <p:cNvPr id="8" name="Shape 6"/>
+          <p:cNvSpPr/>
+          <p:nvPr/>
+        </p:nvSpPr>
+        <p:spPr>
+          <a:xfrm>
+            <a:off x="1143000" y="6840885"/>
+            <a:ext cx="47625" cy="992386"/>
           </a:xfrm>
           <a:prstGeom prst="rect">
             <a:avLst/>
@@ -18861,98 +19660,157 @@
           <a:solidFill>
             <a:srgbClr val="C0623F"/>
           </a:solidFill>
-          <a:ln>
-            <a:noFill/>
-          </a:ln>
-        </p:spPr>
-        <p:style>
-          <a:lnRef idx="1">
-            <a:schemeClr val="accent1"/>
-          </a:lnRef>
-          <a:fillRef idx="3">
-            <a:schemeClr val="accent1"/>
-          </a:fillRef>
-          <a:effectRef idx="2">
-            <a:schemeClr val="accent1"/>
-          </a:effectRef>
-          <a:fontRef idx="minor">
-            <a:schemeClr val="lt1"/>
-          </a:fontRef>
-        </p:style>
-        <p:txBody>
-          <a:bodyPr rtlCol="0" anchor="ctr"/>
-          <a:lstStyle/>
-          <a:p>
-            <a:pPr algn="ctr"/>
-          </a:p>
-        </p:txBody>
-      </p:sp>
-      <p:sp>
-        <p:nvSpPr>
-          <p:cNvPr id="5" name="TextBox 4"/>
-          <p:cNvSpPr txBox="1"/>
-          <p:nvPr/>
-        </p:nvSpPr>
-        <p:spPr>
-          <a:xfrm>
-            <a:off x="1554480" y="3108960"/>
-            <a:ext cx="15179040" cy="3931920"/>
-          </a:xfrm>
-          <a:prstGeom prst="rect">
-            <a:avLst/>
-          </a:prstGeom>
-          <a:noFill/>
-        </p:spPr>
-        <p:txBody>
-          <a:bodyPr wrap="square" anchor="ctr">
-            <a:normAutofit/>
-          </a:bodyPr>
-          <a:lstStyle/>
-          <a:p>
-            <a:r>
-              <a:rPr sz="5400" b="1">
-                <a:solidFill>
-                  <a:srgbClr val="FFFFFF"/>
-                </a:solidFill>
-                <a:latin typeface="Arial"/>
-              </a:rPr>
-              <a:t>Un avocat a cité six jugements à l'appui de son dossier. Aucun n'existait.</a:t>
-            </a:r>
-          </a:p>
-        </p:txBody>
-      </p:sp>
-      <p:sp>
-        <p:nvSpPr>
-          <p:cNvPr id="6" name="TextBox 5"/>
-          <p:cNvSpPr txBox="1"/>
-          <p:nvPr/>
-        </p:nvSpPr>
-        <p:spPr>
-          <a:xfrm>
-            <a:off x="16093440" y="9400032"/>
-            <a:ext cx="1143000" cy="310896"/>
-          </a:xfrm>
-          <a:prstGeom prst="rect">
-            <a:avLst/>
-          </a:prstGeom>
-          <a:noFill/>
-        </p:spPr>
-        <p:txBody>
-          <a:bodyPr wrap="none">
-            <a:spAutoFit/>
-          </a:bodyPr>
-          <a:lstStyle/>
-          <a:p>
-            <a:pPr algn="r"/>
-            <a:r>
-              <a:rPr sz="1100">
-                <a:solidFill>
-                  <a:srgbClr val="F7F2EA"/>
-                </a:solidFill>
-                <a:latin typeface="Arial"/>
+          <a:ln/>
+        </p:spPr>
+      </p:sp>
+      <p:sp>
+        <p:nvSpPr>
+          <p:cNvPr id="9" name="Text 7"/>
+          <p:cNvSpPr/>
+          <p:nvPr/>
+        </p:nvSpPr>
+        <p:spPr>
+          <a:xfrm>
+            <a:off x="1552575" y="7126635"/>
+            <a:ext cx="13420859" cy="458986"/>
+          </a:xfrm>
+          <a:prstGeom prst="rect">
+            <a:avLst/>
+          </a:prstGeom>
+          <a:noFill/>
+          <a:ln/>
+        </p:spPr>
+        <p:txBody>
+          <a:bodyPr wrap="square" lIns="25400" tIns="25400" rIns="25400" bIns="25400" rtlCol="0" anchor="t">
+            <a:normAutofit fontScale="92500" lnSpcReduction="10000"/>
+          </a:bodyPr>
+          <a:lstStyle/>
+          <a:p>
+            <a:pPr marL="0" indent="0" algn="l">
+              <a:lnSpc>
+                <a:spcPct val="135000"/>
+              </a:lnSpc>
+              <a:buNone/>
+            </a:pPr>
+            <a:r>
+              <a:rPr lang="en-US" sz="2400" dirty="0">
+                <a:solidFill>
+                  <a:srgbClr val="1E2933"/>
+                </a:solidFill>
+                <a:latin typeface="Arial" pitchFamily="34" charset="0"/>
+                <a:ea typeface="Arial" pitchFamily="34" charset="-122"/>
+                <a:cs typeface="Arial" pitchFamily="34" charset="-120"/>
+              </a:rPr>
+              <a:t>L'IA n'avait pas menti : elle avait produit du texte </a:t>
+            </a:r>
+            <a:r>
+              <a:rPr lang="en-US" sz="2400" b="1" dirty="0">
+                <a:solidFill>
+                  <a:srgbClr val="C0623F"/>
+                </a:solidFill>
+                <a:latin typeface="Arial" pitchFamily="34" charset="0"/>
+                <a:ea typeface="Arial" pitchFamily="34" charset="-122"/>
+                <a:cs typeface="Arial" pitchFamily="34" charset="-120"/>
+              </a:rPr>
+              <a:t>plausible</a:t>
+            </a:r>
+            <a:r>
+              <a:rPr lang="en-US" sz="2400" dirty="0">
+                <a:solidFill>
+                  <a:srgbClr val="1E2933"/>
+                </a:solidFill>
+                <a:latin typeface="Arial" pitchFamily="34" charset="0"/>
+                <a:ea typeface="Arial" pitchFamily="34" charset="-122"/>
+                <a:cs typeface="Arial" pitchFamily="34" charset="-120"/>
+              </a:rPr>
+              <a:t>. Vérifier, c'est notre métier.</a:t>
+            </a:r>
+            <a:endParaRPr lang="en-US" sz="2400" dirty="0"/>
+          </a:p>
+        </p:txBody>
+      </p:sp>
+      <p:sp>
+        <p:nvSpPr>
+          <p:cNvPr id="10" name="Shape 8"/>
+          <p:cNvSpPr/>
+          <p:nvPr/>
+        </p:nvSpPr>
+        <p:spPr>
+          <a:xfrm>
+            <a:off x="1143000" y="9020175"/>
+            <a:ext cx="16002000" cy="9525"/>
+          </a:xfrm>
+          <a:prstGeom prst="rect">
+            <a:avLst/>
+          </a:prstGeom>
+          <a:solidFill>
+            <a:srgbClr val="D5DBDF"/>
+          </a:solidFill>
+          <a:ln/>
+        </p:spPr>
+      </p:sp>
+      <p:pic>
+        <p:nvPicPr>
+          <p:cNvPr id="11" name="Image 0" descr="preencoded.png"/>
+          <p:cNvPicPr>
+            <a:picLocks noChangeAspect="1"/>
+          </p:cNvPicPr>
+          <p:nvPr/>
+        </p:nvPicPr>
+        <p:blipFill>
+          <a:blip r:embed="rId3"/>
+          <a:stretch>
+            <a:fillRect/>
+          </a:stretch>
+        </p:blipFill>
+        <p:spPr>
+          <a:xfrm>
+            <a:off x="1143000" y="9239250"/>
+            <a:ext cx="393204" cy="590550"/>
+          </a:xfrm>
+          <a:prstGeom prst="rect">
+            <a:avLst/>
+          </a:prstGeom>
+        </p:spPr>
+      </p:pic>
+      <p:sp>
+        <p:nvSpPr>
+          <p:cNvPr id="12" name="Text 9"/>
+          <p:cNvSpPr/>
+          <p:nvPr/>
+        </p:nvSpPr>
+        <p:spPr>
+          <a:xfrm>
+            <a:off x="16234023" y="9396413"/>
+            <a:ext cx="987177" cy="314325"/>
+          </a:xfrm>
+          <a:prstGeom prst="rect">
+            <a:avLst/>
+          </a:prstGeom>
+          <a:noFill/>
+          <a:ln/>
+        </p:spPr>
+        <p:txBody>
+          <a:bodyPr wrap="square" lIns="25400" tIns="25400" rIns="25400" bIns="25400" rtlCol="0" anchor="t">
+            <a:normAutofit lnSpcReduction="10000"/>
+          </a:bodyPr>
+          <a:lstStyle/>
+          <a:p>
+            <a:pPr marL="0" indent="0" algn="l">
+              <a:buNone/>
+            </a:pPr>
+            <a:r>
+              <a:rPr lang="en-US" sz="1800" kern="0" spc="150" dirty="0">
+                <a:solidFill>
+                  <a:srgbClr val="8A9097"/>
+                </a:solidFill>
+                <a:latin typeface="Arial" pitchFamily="34" charset="0"/>
+                <a:ea typeface="Arial" pitchFamily="34" charset="-122"/>
+                <a:cs typeface="Arial" pitchFamily="34" charset="-120"/>
               </a:rPr>
               <a:t>09 / 23</a:t>
             </a:r>
+            <a:endParaRPr lang="en-US" sz="1800" dirty="0"/>
           </a:p>
         </p:txBody>
       </p:sp>
